--- a/workflow_analysis/spm_figures/spm_dags/ddmd_dags.pptx
+++ b/workflow_analysis/spm_figures/spm_dags/ddmd_dags.pptx
@@ -259,7 +259,7 @@
           <a:p>
             <a:fld id="{55E644DB-C3A0-4FF1-A7C5-619927E31133}" type="datetimeFigureOut">
               <a:rPr lang="en-US" smtClean="0"/>
-              <a:t>2/6/2025</a:t>
+              <a:t>9/13/2025</a:t>
             </a:fld>
             <a:endParaRPr lang="en-US"/>
           </a:p>
@@ -457,7 +457,7 @@
           <a:p>
             <a:fld id="{55E644DB-C3A0-4FF1-A7C5-619927E31133}" type="datetimeFigureOut">
               <a:rPr lang="en-US" smtClean="0"/>
-              <a:t>2/6/2025</a:t>
+              <a:t>9/13/2025</a:t>
             </a:fld>
             <a:endParaRPr lang="en-US"/>
           </a:p>
@@ -665,7 +665,7 @@
           <a:p>
             <a:fld id="{55E644DB-C3A0-4FF1-A7C5-619927E31133}" type="datetimeFigureOut">
               <a:rPr lang="en-US" smtClean="0"/>
-              <a:t>2/6/2025</a:t>
+              <a:t>9/13/2025</a:t>
             </a:fld>
             <a:endParaRPr lang="en-US"/>
           </a:p>
@@ -863,7 +863,7 @@
           <a:p>
             <a:fld id="{55E644DB-C3A0-4FF1-A7C5-619927E31133}" type="datetimeFigureOut">
               <a:rPr lang="en-US" smtClean="0"/>
-              <a:t>2/6/2025</a:t>
+              <a:t>9/13/2025</a:t>
             </a:fld>
             <a:endParaRPr lang="en-US"/>
           </a:p>
@@ -1138,7 +1138,7 @@
           <a:p>
             <a:fld id="{55E644DB-C3A0-4FF1-A7C5-619927E31133}" type="datetimeFigureOut">
               <a:rPr lang="en-US" smtClean="0"/>
-              <a:t>2/6/2025</a:t>
+              <a:t>9/13/2025</a:t>
             </a:fld>
             <a:endParaRPr lang="en-US"/>
           </a:p>
@@ -1403,7 +1403,7 @@
           <a:p>
             <a:fld id="{55E644DB-C3A0-4FF1-A7C5-619927E31133}" type="datetimeFigureOut">
               <a:rPr lang="en-US" smtClean="0"/>
-              <a:t>2/6/2025</a:t>
+              <a:t>9/13/2025</a:t>
             </a:fld>
             <a:endParaRPr lang="en-US"/>
           </a:p>
@@ -1815,7 +1815,7 @@
           <a:p>
             <a:fld id="{55E644DB-C3A0-4FF1-A7C5-619927E31133}" type="datetimeFigureOut">
               <a:rPr lang="en-US" smtClean="0"/>
-              <a:t>2/6/2025</a:t>
+              <a:t>9/13/2025</a:t>
             </a:fld>
             <a:endParaRPr lang="en-US"/>
           </a:p>
@@ -1956,7 +1956,7 @@
           <a:p>
             <a:fld id="{55E644DB-C3A0-4FF1-A7C5-619927E31133}" type="datetimeFigureOut">
               <a:rPr lang="en-US" smtClean="0"/>
-              <a:t>2/6/2025</a:t>
+              <a:t>9/13/2025</a:t>
             </a:fld>
             <a:endParaRPr lang="en-US"/>
           </a:p>
@@ -2069,7 +2069,7 @@
           <a:p>
             <a:fld id="{55E644DB-C3A0-4FF1-A7C5-619927E31133}" type="datetimeFigureOut">
               <a:rPr lang="en-US" smtClean="0"/>
-              <a:t>2/6/2025</a:t>
+              <a:t>9/13/2025</a:t>
             </a:fld>
             <a:endParaRPr lang="en-US"/>
           </a:p>
@@ -2380,7 +2380,7 @@
           <a:p>
             <a:fld id="{55E644DB-C3A0-4FF1-A7C5-619927E31133}" type="datetimeFigureOut">
               <a:rPr lang="en-US" smtClean="0"/>
-              <a:t>2/6/2025</a:t>
+              <a:t>9/13/2025</a:t>
             </a:fld>
             <a:endParaRPr lang="en-US"/>
           </a:p>
@@ -2668,7 +2668,7 @@
           <a:p>
             <a:fld id="{55E644DB-C3A0-4FF1-A7C5-619927E31133}" type="datetimeFigureOut">
               <a:rPr lang="en-US" smtClean="0"/>
-              <a:t>2/6/2025</a:t>
+              <a:t>9/13/2025</a:t>
             </a:fld>
             <a:endParaRPr lang="en-US"/>
           </a:p>
@@ -2909,7 +2909,7 @@
           <a:p>
             <a:fld id="{55E644DB-C3A0-4FF1-A7C5-619927E31133}" type="datetimeFigureOut">
               <a:rPr lang="en-US" smtClean="0"/>
-              <a:t>2/6/2025</a:t>
+              <a:t>9/13/2025</a:t>
             </a:fld>
             <a:endParaRPr lang="en-US"/>
           </a:p>
@@ -3340,10 +3340,10 @@
         </p:nvGrpSpPr>
         <p:grpSpPr>
           <a:xfrm>
-            <a:off x="630515" y="1133476"/>
-            <a:ext cx="3561414" cy="4074960"/>
-            <a:chOff x="440015" y="847726"/>
-            <a:chExt cx="3561414" cy="4074960"/>
+            <a:off x="649303" y="1412420"/>
+            <a:ext cx="3542626" cy="3161873"/>
+            <a:chOff x="458803" y="1126670"/>
+            <a:chExt cx="3542626" cy="3161873"/>
           </a:xfrm>
         </p:grpSpPr>
         <p:grpSp>
@@ -3361,9 +3361,9 @@
           <p:grpSpPr>
             <a:xfrm>
               <a:off x="1048934" y="1774635"/>
-              <a:ext cx="508066" cy="2186161"/>
+              <a:ext cx="508066" cy="1649696"/>
               <a:chOff x="2537327" y="2106291"/>
-              <a:chExt cx="454650" cy="1956319"/>
+              <a:chExt cx="454650" cy="1476255"/>
             </a:xfrm>
           </p:grpSpPr>
           <p:sp>
@@ -3522,58 +3522,6 @@
               </a:p>
             </p:txBody>
           </p:sp>
-          <p:sp>
-            <p:nvSpPr>
-              <p:cNvPr id="57" name="Oval 56">
-                <a:extLst>
-                  <a:ext uri="{FF2B5EF4-FFF2-40B4-BE49-F238E27FC236}">
-                    <a16:creationId xmlns:a16="http://schemas.microsoft.com/office/drawing/2014/main" id="{FF6A12AE-521F-A83B-060B-95817D9D4FA0}"/>
-                  </a:ext>
-                </a:extLst>
-              </p:cNvPr>
-              <p:cNvSpPr/>
-              <p:nvPr/>
-            </p:nvSpPr>
-            <p:spPr>
-              <a:xfrm>
-                <a:off x="2543109" y="3618857"/>
-                <a:ext cx="443753" cy="443753"/>
-              </a:xfrm>
-              <a:prstGeom prst="ellipse">
-                <a:avLst/>
-              </a:prstGeom>
-              <a:solidFill>
-                <a:schemeClr val="accent6"/>
-              </a:solidFill>
-              <a:ln>
-                <a:noFill/>
-              </a:ln>
-            </p:spPr>
-            <p:style>
-              <a:lnRef idx="2">
-                <a:schemeClr val="accent1">
-                  <a:shade val="15000"/>
-                </a:schemeClr>
-              </a:lnRef>
-              <a:fillRef idx="1">
-                <a:schemeClr val="accent1"/>
-              </a:fillRef>
-              <a:effectRef idx="0">
-                <a:schemeClr val="accent1"/>
-              </a:effectRef>
-              <a:fontRef idx="minor">
-                <a:schemeClr val="lt1"/>
-              </a:fontRef>
-            </p:style>
-            <p:txBody>
-              <a:bodyPr rtlCol="0" anchor="ctr"/>
-              <a:lstStyle/>
-              <a:p>
-                <a:pPr algn="ctr"/>
-                <a:endParaRPr lang="en-US" sz="3200" dirty="0"/>
-              </a:p>
-            </p:txBody>
-          </p:sp>
         </p:grpSp>
         <p:grpSp>
           <p:nvGrpSpPr>
@@ -3589,10 +3537,10 @@
           </p:nvGrpSpPr>
           <p:grpSpPr>
             <a:xfrm>
-              <a:off x="543235" y="1148767"/>
-              <a:ext cx="1572281" cy="3440802"/>
-              <a:chOff x="2262204" y="1609165"/>
-              <a:chExt cx="1039907" cy="2578978"/>
+              <a:off x="543235" y="1349314"/>
+              <a:ext cx="1572281" cy="2664993"/>
+              <a:chOff x="2262204" y="1759480"/>
+              <a:chExt cx="1039907" cy="1997487"/>
             </a:xfrm>
           </p:grpSpPr>
           <p:sp>
@@ -3609,7 +3557,7 @@
             </p:nvSpPr>
             <p:spPr>
               <a:xfrm>
-                <a:off x="2262204" y="1655382"/>
+                <a:off x="2262204" y="1771948"/>
                 <a:ext cx="1039907" cy="574444"/>
               </a:xfrm>
               <a:prstGeom prst="rect">
@@ -3660,8 +3608,8 @@
             </p:nvSpPr>
             <p:spPr>
               <a:xfrm>
-                <a:off x="2413195" y="1609165"/>
-                <a:ext cx="744475" cy="2578978"/>
+                <a:off x="2413195" y="1759480"/>
+                <a:ext cx="744475" cy="1997487"/>
               </a:xfrm>
               <a:prstGeom prst="roundRect">
                 <a:avLst/>
@@ -3718,9 +3666,9 @@
           <p:grpSpPr>
             <a:xfrm>
               <a:off x="2074554" y="1802836"/>
-              <a:ext cx="307438" cy="2211471"/>
+              <a:ext cx="307438" cy="1636508"/>
               <a:chOff x="3489351" y="1847795"/>
-              <a:chExt cx="526877" cy="3789952"/>
+              <a:chExt cx="526877" cy="2804597"/>
             </a:xfrm>
           </p:grpSpPr>
           <p:sp>
@@ -3849,61 +3797,6 @@
               <a:xfrm>
                 <a:off x="3512974" y="3941951"/>
                 <a:ext cx="503254" cy="710441"/>
-              </a:xfrm>
-              <a:prstGeom prst="rect">
-                <a:avLst/>
-              </a:prstGeom>
-              <a:solidFill>
-                <a:schemeClr val="accent1">
-                  <a:lumMod val="60000"/>
-                  <a:lumOff val="40000"/>
-                </a:schemeClr>
-              </a:solidFill>
-              <a:ln>
-                <a:noFill/>
-              </a:ln>
-            </p:spPr>
-            <p:style>
-              <a:lnRef idx="2">
-                <a:schemeClr val="accent1">
-                  <a:shade val="15000"/>
-                </a:schemeClr>
-              </a:lnRef>
-              <a:fillRef idx="1">
-                <a:schemeClr val="accent1"/>
-              </a:fillRef>
-              <a:effectRef idx="0">
-                <a:schemeClr val="accent1"/>
-              </a:effectRef>
-              <a:fontRef idx="minor">
-                <a:schemeClr val="lt1"/>
-              </a:fontRef>
-            </p:style>
-            <p:txBody>
-              <a:bodyPr rtlCol="0" anchor="ctr"/>
-              <a:lstStyle/>
-              <a:p>
-                <a:pPr algn="ctr"/>
-                <a:endParaRPr lang="en-US" sz="3200"/>
-              </a:p>
-            </p:txBody>
-          </p:sp>
-          <p:sp>
-            <p:nvSpPr>
-              <p:cNvPr id="49" name="Rectangle 48">
-                <a:extLst>
-                  <a:ext uri="{FF2B5EF4-FFF2-40B4-BE49-F238E27FC236}">
-                    <a16:creationId xmlns:a16="http://schemas.microsoft.com/office/drawing/2014/main" id="{FA8CA70E-916A-2FD9-15D9-43A8CBC369B8}"/>
-                  </a:ext>
-                </a:extLst>
-              </p:cNvPr>
-              <p:cNvSpPr/>
-              <p:nvPr/>
-            </p:nvSpPr>
-            <p:spPr>
-              <a:xfrm>
-                <a:off x="3514351" y="4927306"/>
-                <a:ext cx="470991" cy="710441"/>
               </a:xfrm>
               <a:prstGeom prst="rect">
                 <a:avLst/>
@@ -4084,52 +3977,6 @@
         </p:cxnSp>
         <p:cxnSp>
           <p:nvCxnSpPr>
-            <p:cNvPr id="41" name="Straight Arrow Connector 40">
-              <a:extLst>
-                <a:ext uri="{FF2B5EF4-FFF2-40B4-BE49-F238E27FC236}">
-                  <a16:creationId xmlns:a16="http://schemas.microsoft.com/office/drawing/2014/main" id="{079AFBAB-11BA-BA48-6A73-E658E9C371DC}"/>
-                </a:ext>
-              </a:extLst>
-            </p:cNvPr>
-            <p:cNvCxnSpPr>
-              <a:cxnSpLocks/>
-              <a:stCxn id="57" idx="6"/>
-              <a:endCxn id="49" idx="1"/>
-            </p:cNvCxnSpPr>
-            <p:nvPr/>
-          </p:nvCxnSpPr>
-          <p:spPr>
-            <a:xfrm>
-              <a:off x="1551284" y="3712852"/>
-              <a:ext cx="537858" cy="94181"/>
-            </a:xfrm>
-            <a:prstGeom prst="straightConnector1">
-              <a:avLst/>
-            </a:prstGeom>
-            <a:ln w="12700">
-              <a:solidFill>
-                <a:srgbClr val="00B0F0"/>
-              </a:solidFill>
-              <a:tailEnd type="triangle"/>
-            </a:ln>
-          </p:spPr>
-          <p:style>
-            <a:lnRef idx="2">
-              <a:schemeClr val="accent1"/>
-            </a:lnRef>
-            <a:fillRef idx="0">
-              <a:schemeClr val="accent1"/>
-            </a:fillRef>
-            <a:effectRef idx="1">
-              <a:schemeClr val="accent1"/>
-            </a:effectRef>
-            <a:fontRef idx="minor">
-              <a:schemeClr val="tx1"/>
-            </a:fontRef>
-          </p:style>
-        </p:cxnSp>
-        <p:cxnSp>
-          <p:nvCxnSpPr>
             <p:cNvPr id="42" name="Straight Arrow Connector 41">
               <a:extLst>
                 <a:ext uri="{FF2B5EF4-FFF2-40B4-BE49-F238E27FC236}">
@@ -4234,10 +4081,10 @@
           </p:nvGrpSpPr>
           <p:grpSpPr>
             <a:xfrm>
-              <a:off x="642939" y="847726"/>
-              <a:ext cx="3262312" cy="4074960"/>
-              <a:chOff x="830696" y="1142116"/>
-              <a:chExt cx="4908016" cy="4547456"/>
+              <a:off x="642939" y="1126670"/>
+              <a:ext cx="3262312" cy="3134911"/>
+              <a:chOff x="830696" y="1453404"/>
+              <a:chExt cx="4908016" cy="3498407"/>
             </a:xfrm>
           </p:grpSpPr>
           <p:sp>
@@ -4254,8 +4101,8 @@
             </p:nvSpPr>
             <p:spPr>
               <a:xfrm>
-                <a:off x="830696" y="1142116"/>
-                <a:ext cx="4908016" cy="4547456"/>
+                <a:off x="830696" y="1453404"/>
+                <a:ext cx="4908016" cy="3498407"/>
               </a:xfrm>
               <a:prstGeom prst="roundRect">
                 <a:avLst/>
@@ -4307,7 +4154,7 @@
             </p:nvSpPr>
             <p:spPr>
               <a:xfrm>
-                <a:off x="2911026" y="1249358"/>
+                <a:off x="2963087" y="1550829"/>
                 <a:ext cx="2630710" cy="652580"/>
               </a:xfrm>
               <a:prstGeom prst="rect">
@@ -4348,7 +4195,7 @@
           </p:nvSpPr>
           <p:spPr>
             <a:xfrm>
-              <a:off x="440015" y="3944856"/>
+              <a:off x="458803" y="3310713"/>
               <a:ext cx="1725905" cy="977830"/>
             </a:xfrm>
             <a:prstGeom prst="rect">
@@ -4437,52 +4284,6 @@
             </a:fontRef>
           </p:style>
         </p:cxnSp>
-        <p:cxnSp>
-          <p:nvCxnSpPr>
-            <p:cNvPr id="130" name="Straight Arrow Connector 129">
-              <a:extLst>
-                <a:ext uri="{FF2B5EF4-FFF2-40B4-BE49-F238E27FC236}">
-                  <a16:creationId xmlns:a16="http://schemas.microsoft.com/office/drawing/2014/main" id="{6200E53D-6261-3803-2C9D-030FC2602A27}"/>
-                </a:ext>
-              </a:extLst>
-            </p:cNvPr>
-            <p:cNvCxnSpPr>
-              <a:cxnSpLocks/>
-              <a:stCxn id="49" idx="3"/>
-              <a:endCxn id="52" idx="2"/>
-            </p:cNvCxnSpPr>
-            <p:nvPr/>
-          </p:nvCxnSpPr>
-          <p:spPr>
-            <a:xfrm flipV="1">
-              <a:off x="2363970" y="2957831"/>
-              <a:ext cx="476105" cy="849202"/>
-            </a:xfrm>
-            <a:prstGeom prst="straightConnector1">
-              <a:avLst/>
-            </a:prstGeom>
-            <a:ln w="12700">
-              <a:solidFill>
-                <a:srgbClr val="00B0F0"/>
-              </a:solidFill>
-              <a:tailEnd type="triangle"/>
-            </a:ln>
-          </p:spPr>
-          <p:style>
-            <a:lnRef idx="2">
-              <a:schemeClr val="accent1"/>
-            </a:lnRef>
-            <a:fillRef idx="0">
-              <a:schemeClr val="accent1"/>
-            </a:fillRef>
-            <a:effectRef idx="1">
-              <a:schemeClr val="accent1"/>
-            </a:effectRef>
-            <a:fontRef idx="minor">
-              <a:schemeClr val="tx1"/>
-            </a:fontRef>
-          </p:style>
-        </p:cxnSp>
         <p:grpSp>
           <p:nvGrpSpPr>
             <p:cNvPr id="301" name="Group 300">
@@ -4497,10 +4298,10 @@
           </p:nvGrpSpPr>
           <p:grpSpPr>
             <a:xfrm>
-              <a:off x="2260211" y="2157057"/>
-              <a:ext cx="1741218" cy="1827925"/>
-              <a:chOff x="3763543" y="3171826"/>
-              <a:chExt cx="1708948" cy="1794049"/>
+              <a:off x="2254367" y="2157058"/>
+              <a:ext cx="1747062" cy="1983372"/>
+              <a:chOff x="3757808" y="3171826"/>
+              <a:chExt cx="1714684" cy="1946615"/>
             </a:xfrm>
           </p:grpSpPr>
           <p:sp>
@@ -4569,10 +4370,10 @@
             </p:nvGrpSpPr>
             <p:grpSpPr>
               <a:xfrm>
-                <a:off x="3763543" y="3171826"/>
-                <a:ext cx="1708948" cy="1794049"/>
-                <a:chOff x="2904164" y="3080423"/>
-                <a:chExt cx="1708948" cy="1794049"/>
+                <a:off x="3757808" y="3171826"/>
+                <a:ext cx="1714684" cy="1946615"/>
+                <a:chOff x="2898429" y="3080423"/>
+                <a:chExt cx="1714684" cy="1946615"/>
               </a:xfrm>
             </p:grpSpPr>
             <p:grpSp>
@@ -4712,8 +4513,8 @@
               </p:nvSpPr>
               <p:spPr>
                 <a:xfrm>
-                  <a:off x="2919193" y="3940702"/>
-                  <a:ext cx="1693919" cy="933770"/>
+                  <a:off x="2898429" y="3939576"/>
+                  <a:ext cx="1714684" cy="1087462"/>
                 </a:xfrm>
                 <a:prstGeom prst="rect">
                   <a:avLst/>
@@ -4769,10 +4570,10 @@
         </p:nvGrpSpPr>
         <p:grpSpPr>
           <a:xfrm>
-            <a:off x="4264150" y="1133476"/>
-            <a:ext cx="3585702" cy="4074960"/>
-            <a:chOff x="440015" y="847726"/>
-            <a:chExt cx="3585702" cy="4074960"/>
+            <a:off x="4279887" y="1412420"/>
+            <a:ext cx="3569965" cy="3161873"/>
+            <a:chOff x="455752" y="1126670"/>
+            <a:chExt cx="3569965" cy="3161873"/>
           </a:xfrm>
         </p:grpSpPr>
         <p:grpSp>
@@ -4790,9 +4591,9 @@
           <p:grpSpPr>
             <a:xfrm>
               <a:off x="1048934" y="1774635"/>
-              <a:ext cx="508066" cy="2186161"/>
+              <a:ext cx="508066" cy="1649696"/>
               <a:chOff x="2537327" y="2106291"/>
-              <a:chExt cx="454650" cy="1956319"/>
+              <a:chExt cx="454650" cy="1476255"/>
             </a:xfrm>
           </p:grpSpPr>
           <p:sp>
@@ -4951,58 +4752,6 @@
               </a:p>
             </p:txBody>
           </p:sp>
-          <p:sp>
-            <p:nvSpPr>
-              <p:cNvPr id="260" name="Oval 259">
-                <a:extLst>
-                  <a:ext uri="{FF2B5EF4-FFF2-40B4-BE49-F238E27FC236}">
-                    <a16:creationId xmlns:a16="http://schemas.microsoft.com/office/drawing/2014/main" id="{D10F9C64-A9AA-7AD1-CF79-47678191754C}"/>
-                  </a:ext>
-                </a:extLst>
-              </p:cNvPr>
-              <p:cNvSpPr/>
-              <p:nvPr/>
-            </p:nvSpPr>
-            <p:spPr>
-              <a:xfrm>
-                <a:off x="2543109" y="3618857"/>
-                <a:ext cx="443753" cy="443753"/>
-              </a:xfrm>
-              <a:prstGeom prst="ellipse">
-                <a:avLst/>
-              </a:prstGeom>
-              <a:solidFill>
-                <a:schemeClr val="accent6"/>
-              </a:solidFill>
-              <a:ln>
-                <a:noFill/>
-              </a:ln>
-            </p:spPr>
-            <p:style>
-              <a:lnRef idx="2">
-                <a:schemeClr val="accent1">
-                  <a:shade val="15000"/>
-                </a:schemeClr>
-              </a:lnRef>
-              <a:fillRef idx="1">
-                <a:schemeClr val="accent1"/>
-              </a:fillRef>
-              <a:effectRef idx="0">
-                <a:schemeClr val="accent1"/>
-              </a:effectRef>
-              <a:fontRef idx="minor">
-                <a:schemeClr val="lt1"/>
-              </a:fontRef>
-            </p:style>
-            <p:txBody>
-              <a:bodyPr rtlCol="0" anchor="ctr"/>
-              <a:lstStyle/>
-              <a:p>
-                <a:pPr algn="ctr"/>
-                <a:endParaRPr lang="en-US" sz="3200" dirty="0"/>
-              </a:p>
-            </p:txBody>
-          </p:sp>
         </p:grpSp>
         <p:grpSp>
           <p:nvGrpSpPr>
@@ -5018,10 +4767,10 @@
           </p:nvGrpSpPr>
           <p:grpSpPr>
             <a:xfrm>
-              <a:off x="543235" y="1148767"/>
-              <a:ext cx="1572281" cy="3440802"/>
-              <a:chOff x="2262204" y="1609165"/>
-              <a:chExt cx="1039907" cy="2578978"/>
+              <a:off x="543235" y="1349314"/>
+              <a:ext cx="1572281" cy="2648954"/>
+              <a:chOff x="2262204" y="1759481"/>
+              <a:chExt cx="1039907" cy="1985466"/>
             </a:xfrm>
           </p:grpSpPr>
           <p:sp>
@@ -5038,7 +4787,7 @@
             </p:nvSpPr>
             <p:spPr>
               <a:xfrm>
-                <a:off x="2262204" y="1655382"/>
+                <a:off x="2262204" y="1759481"/>
                 <a:ext cx="1039907" cy="574444"/>
               </a:xfrm>
               <a:prstGeom prst="rect">
@@ -5089,8 +4838,8 @@
             </p:nvSpPr>
             <p:spPr>
               <a:xfrm>
-                <a:off x="2413195" y="1609165"/>
-                <a:ext cx="744475" cy="2578978"/>
+                <a:off x="2413195" y="1759481"/>
+                <a:ext cx="744475" cy="1985466"/>
               </a:xfrm>
               <a:prstGeom prst="roundRect">
                 <a:avLst/>
@@ -5147,9 +4896,9 @@
           <p:grpSpPr>
             <a:xfrm>
               <a:off x="2074554" y="1802836"/>
-              <a:ext cx="307438" cy="2211471"/>
+              <a:ext cx="307438" cy="1636508"/>
               <a:chOff x="3489351" y="1847795"/>
-              <a:chExt cx="526877" cy="3789952"/>
+              <a:chExt cx="526877" cy="2804597"/>
             </a:xfrm>
           </p:grpSpPr>
           <p:sp>
@@ -5278,61 +5027,6 @@
               <a:xfrm>
                 <a:off x="3512974" y="3941951"/>
                 <a:ext cx="503254" cy="710441"/>
-              </a:xfrm>
-              <a:prstGeom prst="rect">
-                <a:avLst/>
-              </a:prstGeom>
-              <a:solidFill>
-                <a:schemeClr val="accent1">
-                  <a:lumMod val="60000"/>
-                  <a:lumOff val="40000"/>
-                </a:schemeClr>
-              </a:solidFill>
-              <a:ln>
-                <a:noFill/>
-              </a:ln>
-            </p:spPr>
-            <p:style>
-              <a:lnRef idx="2">
-                <a:schemeClr val="accent1">
-                  <a:shade val="15000"/>
-                </a:schemeClr>
-              </a:lnRef>
-              <a:fillRef idx="1">
-                <a:schemeClr val="accent1"/>
-              </a:fillRef>
-              <a:effectRef idx="0">
-                <a:schemeClr val="accent1"/>
-              </a:effectRef>
-              <a:fontRef idx="minor">
-                <a:schemeClr val="lt1"/>
-              </a:fontRef>
-            </p:style>
-            <p:txBody>
-              <a:bodyPr rtlCol="0" anchor="ctr"/>
-              <a:lstStyle/>
-              <a:p>
-                <a:pPr algn="ctr"/>
-                <a:endParaRPr lang="en-US" sz="3200"/>
-              </a:p>
-            </p:txBody>
-          </p:sp>
-          <p:sp>
-            <p:nvSpPr>
-              <p:cNvPr id="190" name="Rectangle 189">
-                <a:extLst>
-                  <a:ext uri="{FF2B5EF4-FFF2-40B4-BE49-F238E27FC236}">
-                    <a16:creationId xmlns:a16="http://schemas.microsoft.com/office/drawing/2014/main" id="{00A73750-C90D-8DE4-FC4F-799EF2DFCAEF}"/>
-                  </a:ext>
-                </a:extLst>
-              </p:cNvPr>
-              <p:cNvSpPr/>
-              <p:nvPr/>
-            </p:nvSpPr>
-            <p:spPr>
-              <a:xfrm>
-                <a:off x="3514351" y="4927306"/>
-                <a:ext cx="470991" cy="710441"/>
               </a:xfrm>
               <a:prstGeom prst="rect">
                 <a:avLst/>
@@ -5513,52 +5207,6 @@
         </p:cxnSp>
         <p:cxnSp>
           <p:nvCxnSpPr>
-            <p:cNvPr id="171" name="Straight Arrow Connector 170">
-              <a:extLst>
-                <a:ext uri="{FF2B5EF4-FFF2-40B4-BE49-F238E27FC236}">
-                  <a16:creationId xmlns:a16="http://schemas.microsoft.com/office/drawing/2014/main" id="{981F2F7D-3200-1EE7-9A1D-A2EE4D5953AD}"/>
-                </a:ext>
-              </a:extLst>
-            </p:cNvPr>
-            <p:cNvCxnSpPr>
-              <a:cxnSpLocks/>
-              <a:stCxn id="260" idx="6"/>
-              <a:endCxn id="190" idx="1"/>
-            </p:cNvCxnSpPr>
-            <p:nvPr/>
-          </p:nvCxnSpPr>
-          <p:spPr>
-            <a:xfrm>
-              <a:off x="1551284" y="3712852"/>
-              <a:ext cx="537858" cy="94181"/>
-            </a:xfrm>
-            <a:prstGeom prst="straightConnector1">
-              <a:avLst/>
-            </a:prstGeom>
-            <a:ln w="12700">
-              <a:solidFill>
-                <a:srgbClr val="00B0F0"/>
-              </a:solidFill>
-              <a:tailEnd type="triangle"/>
-            </a:ln>
-          </p:spPr>
-          <p:style>
-            <a:lnRef idx="2">
-              <a:schemeClr val="accent1"/>
-            </a:lnRef>
-            <a:fillRef idx="0">
-              <a:schemeClr val="accent1"/>
-            </a:fillRef>
-            <a:effectRef idx="1">
-              <a:schemeClr val="accent1"/>
-            </a:effectRef>
-            <a:fontRef idx="minor">
-              <a:schemeClr val="tx1"/>
-            </a:fontRef>
-          </p:style>
-        </p:cxnSp>
-        <p:cxnSp>
-          <p:nvCxnSpPr>
             <p:cNvPr id="172" name="Straight Arrow Connector 171">
               <a:extLst>
                 <a:ext uri="{FF2B5EF4-FFF2-40B4-BE49-F238E27FC236}">
@@ -5663,10 +5311,10 @@
           </p:nvGrpSpPr>
           <p:grpSpPr>
             <a:xfrm>
-              <a:off x="642939" y="847726"/>
-              <a:ext cx="3262312" cy="4074960"/>
-              <a:chOff x="830696" y="1142116"/>
-              <a:chExt cx="4908016" cy="4547456"/>
+              <a:off x="642939" y="1126670"/>
+              <a:ext cx="3262312" cy="3161873"/>
+              <a:chOff x="830696" y="1453404"/>
+              <a:chExt cx="4908016" cy="3528495"/>
             </a:xfrm>
           </p:grpSpPr>
           <p:sp>
@@ -5683,8 +5331,8 @@
             </p:nvSpPr>
             <p:spPr>
               <a:xfrm>
-                <a:off x="830696" y="1142116"/>
-                <a:ext cx="4908016" cy="4547456"/>
+                <a:off x="830696" y="1453404"/>
+                <a:ext cx="4908016" cy="3528495"/>
               </a:xfrm>
               <a:prstGeom prst="roundRect">
                 <a:avLst/>
@@ -5736,7 +5384,7 @@
             </p:nvSpPr>
             <p:spPr>
               <a:xfrm>
-                <a:off x="2911026" y="1249358"/>
+                <a:off x="3044269" y="1557489"/>
                 <a:ext cx="2630710" cy="652580"/>
               </a:xfrm>
               <a:prstGeom prst="rect">
@@ -5777,7 +5425,7 @@
           </p:nvSpPr>
           <p:spPr>
             <a:xfrm>
-              <a:off x="440015" y="3944856"/>
+              <a:off x="455752" y="3283752"/>
               <a:ext cx="1725905" cy="977830"/>
             </a:xfrm>
             <a:prstGeom prst="rect">
@@ -5840,52 +5488,6 @@
             <a:xfrm flipV="1">
               <a:off x="2381992" y="2957831"/>
               <a:ext cx="458083" cy="274239"/>
-            </a:xfrm>
-            <a:prstGeom prst="straightConnector1">
-              <a:avLst/>
-            </a:prstGeom>
-            <a:ln w="12700">
-              <a:solidFill>
-                <a:srgbClr val="00B0F0"/>
-              </a:solidFill>
-              <a:tailEnd type="triangle"/>
-            </a:ln>
-          </p:spPr>
-          <p:style>
-            <a:lnRef idx="2">
-              <a:schemeClr val="accent1"/>
-            </a:lnRef>
-            <a:fillRef idx="0">
-              <a:schemeClr val="accent1"/>
-            </a:fillRef>
-            <a:effectRef idx="1">
-              <a:schemeClr val="accent1"/>
-            </a:effectRef>
-            <a:fontRef idx="minor">
-              <a:schemeClr val="tx1"/>
-            </a:fontRef>
-          </p:style>
-        </p:cxnSp>
-        <p:cxnSp>
-          <p:nvCxnSpPr>
-            <p:cNvPr id="177" name="Straight Arrow Connector 176">
-              <a:extLst>
-                <a:ext uri="{FF2B5EF4-FFF2-40B4-BE49-F238E27FC236}">
-                  <a16:creationId xmlns:a16="http://schemas.microsoft.com/office/drawing/2014/main" id="{5EDEDC67-5619-516D-F828-E7586B49E38B}"/>
-                </a:ext>
-              </a:extLst>
-            </p:cNvPr>
-            <p:cNvCxnSpPr>
-              <a:cxnSpLocks/>
-              <a:stCxn id="190" idx="3"/>
-              <a:endCxn id="179" idx="2"/>
-            </p:cNvCxnSpPr>
-            <p:nvPr/>
-          </p:nvCxnSpPr>
-          <p:spPr>
-            <a:xfrm flipV="1">
-              <a:off x="2363970" y="2957831"/>
-              <a:ext cx="476105" cy="849202"/>
             </a:xfrm>
             <a:prstGeom prst="straightConnector1">
               <a:avLst/>
@@ -6206,10 +5808,10 @@
         </p:nvGrpSpPr>
         <p:grpSpPr>
           <a:xfrm>
-            <a:off x="7864079" y="1117438"/>
-            <a:ext cx="3574839" cy="4074960"/>
-            <a:chOff x="440015" y="847726"/>
-            <a:chExt cx="3574839" cy="4074960"/>
+            <a:off x="7889454" y="1412419"/>
+            <a:ext cx="3549463" cy="3161873"/>
+            <a:chOff x="465390" y="1142707"/>
+            <a:chExt cx="3549463" cy="3161873"/>
           </a:xfrm>
         </p:grpSpPr>
         <p:grpSp>
@@ -6227,9 +5829,9 @@
           <p:grpSpPr>
             <a:xfrm>
               <a:off x="1048934" y="1774635"/>
-              <a:ext cx="508066" cy="2186161"/>
+              <a:ext cx="508066" cy="1649696"/>
               <a:chOff x="2537327" y="2106291"/>
-              <a:chExt cx="454650" cy="1956319"/>
+              <a:chExt cx="454650" cy="1476255"/>
             </a:xfrm>
           </p:grpSpPr>
           <p:sp>
@@ -6388,58 +5990,6 @@
               </a:p>
             </p:txBody>
           </p:sp>
-          <p:sp>
-            <p:nvSpPr>
-              <p:cNvPr id="293" name="Oval 292">
-                <a:extLst>
-                  <a:ext uri="{FF2B5EF4-FFF2-40B4-BE49-F238E27FC236}">
-                    <a16:creationId xmlns:a16="http://schemas.microsoft.com/office/drawing/2014/main" id="{AAA2A006-A1B1-80C0-7C4C-E2385F7A9CBD}"/>
-                  </a:ext>
-                </a:extLst>
-              </p:cNvPr>
-              <p:cNvSpPr/>
-              <p:nvPr/>
-            </p:nvSpPr>
-            <p:spPr>
-              <a:xfrm>
-                <a:off x="2543109" y="3618857"/>
-                <a:ext cx="443753" cy="443753"/>
-              </a:xfrm>
-              <a:prstGeom prst="ellipse">
-                <a:avLst/>
-              </a:prstGeom>
-              <a:solidFill>
-                <a:schemeClr val="accent6"/>
-              </a:solidFill>
-              <a:ln>
-                <a:noFill/>
-              </a:ln>
-            </p:spPr>
-            <p:style>
-              <a:lnRef idx="2">
-                <a:schemeClr val="accent1">
-                  <a:shade val="15000"/>
-                </a:schemeClr>
-              </a:lnRef>
-              <a:fillRef idx="1">
-                <a:schemeClr val="accent1"/>
-              </a:fillRef>
-              <a:effectRef idx="0">
-                <a:schemeClr val="accent1"/>
-              </a:effectRef>
-              <a:fontRef idx="minor">
-                <a:schemeClr val="lt1"/>
-              </a:fontRef>
-            </p:style>
-            <p:txBody>
-              <a:bodyPr rtlCol="0" anchor="ctr"/>
-              <a:lstStyle/>
-              <a:p>
-                <a:pPr algn="ctr"/>
-                <a:endParaRPr lang="en-US" sz="3200" dirty="0"/>
-              </a:p>
-            </p:txBody>
-          </p:sp>
         </p:grpSp>
         <p:grpSp>
           <p:nvGrpSpPr>
@@ -6455,10 +6005,10 @@
           </p:nvGrpSpPr>
           <p:grpSpPr>
             <a:xfrm>
-              <a:off x="543235" y="1148767"/>
-              <a:ext cx="1572281" cy="3440802"/>
-              <a:chOff x="2262204" y="1609165"/>
-              <a:chExt cx="1039907" cy="2578978"/>
+              <a:off x="546762" y="1365351"/>
+              <a:ext cx="1572281" cy="2664994"/>
+              <a:chOff x="2264537" y="1771501"/>
+              <a:chExt cx="1039907" cy="1997488"/>
             </a:xfrm>
           </p:grpSpPr>
           <p:sp>
@@ -6475,7 +6025,7 @@
             </p:nvSpPr>
             <p:spPr>
               <a:xfrm>
-                <a:off x="2262204" y="1655382"/>
+                <a:off x="2264537" y="1771502"/>
                 <a:ext cx="1039907" cy="574444"/>
               </a:xfrm>
               <a:prstGeom prst="rect">
@@ -6526,8 +6076,8 @@
             </p:nvSpPr>
             <p:spPr>
               <a:xfrm>
-                <a:off x="2413195" y="1609165"/>
-                <a:ext cx="744475" cy="2578978"/>
+                <a:off x="2413195" y="1771501"/>
+                <a:ext cx="744475" cy="1997488"/>
               </a:xfrm>
               <a:prstGeom prst="roundRect">
                 <a:avLst/>
@@ -6584,9 +6134,9 @@
           <p:grpSpPr>
             <a:xfrm>
               <a:off x="2074554" y="1802836"/>
-              <a:ext cx="307438" cy="2211471"/>
+              <a:ext cx="307438" cy="1636508"/>
               <a:chOff x="3489351" y="1847795"/>
-              <a:chExt cx="526877" cy="3789952"/>
+              <a:chExt cx="526877" cy="2804597"/>
             </a:xfrm>
           </p:grpSpPr>
           <p:sp>
@@ -6715,61 +6265,6 @@
               <a:xfrm>
                 <a:off x="3512974" y="3941951"/>
                 <a:ext cx="503254" cy="710441"/>
-              </a:xfrm>
-              <a:prstGeom prst="rect">
-                <a:avLst/>
-              </a:prstGeom>
-              <a:solidFill>
-                <a:schemeClr val="accent1">
-                  <a:lumMod val="60000"/>
-                  <a:lumOff val="40000"/>
-                </a:schemeClr>
-              </a:solidFill>
-              <a:ln>
-                <a:noFill/>
-              </a:ln>
-            </p:spPr>
-            <p:style>
-              <a:lnRef idx="2">
-                <a:schemeClr val="accent1">
-                  <a:shade val="15000"/>
-                </a:schemeClr>
-              </a:lnRef>
-              <a:fillRef idx="1">
-                <a:schemeClr val="accent1"/>
-              </a:fillRef>
-              <a:effectRef idx="0">
-                <a:schemeClr val="accent1"/>
-              </a:effectRef>
-              <a:fontRef idx="minor">
-                <a:schemeClr val="lt1"/>
-              </a:fontRef>
-            </p:style>
-            <p:txBody>
-              <a:bodyPr rtlCol="0" anchor="ctr"/>
-              <a:lstStyle/>
-              <a:p>
-                <a:pPr algn="ctr"/>
-                <a:endParaRPr lang="en-US" sz="3200"/>
-              </a:p>
-            </p:txBody>
-          </p:sp>
-          <p:sp>
-            <p:nvSpPr>
-              <p:cNvPr id="287" name="Rectangle 286">
-                <a:extLst>
-                  <a:ext uri="{FF2B5EF4-FFF2-40B4-BE49-F238E27FC236}">
-                    <a16:creationId xmlns:a16="http://schemas.microsoft.com/office/drawing/2014/main" id="{E46E2B3B-582A-64B9-71CD-365557275422}"/>
-                  </a:ext>
-                </a:extLst>
-              </p:cNvPr>
-              <p:cNvSpPr/>
-              <p:nvPr/>
-            </p:nvSpPr>
-            <p:spPr>
-              <a:xfrm>
-                <a:off x="3514351" y="4927306"/>
-                <a:ext cx="470991" cy="710441"/>
               </a:xfrm>
               <a:prstGeom prst="rect">
                 <a:avLst/>
@@ -6950,52 +6445,6 @@
         </p:cxnSp>
         <p:cxnSp>
           <p:nvCxnSpPr>
-            <p:cNvPr id="268" name="Straight Arrow Connector 267">
-              <a:extLst>
-                <a:ext uri="{FF2B5EF4-FFF2-40B4-BE49-F238E27FC236}">
-                  <a16:creationId xmlns:a16="http://schemas.microsoft.com/office/drawing/2014/main" id="{33694312-7EDC-8612-D9FD-A2142E2E3D04}"/>
-                </a:ext>
-              </a:extLst>
-            </p:cNvPr>
-            <p:cNvCxnSpPr>
-              <a:cxnSpLocks/>
-              <a:stCxn id="293" idx="6"/>
-              <a:endCxn id="287" idx="1"/>
-            </p:cNvCxnSpPr>
-            <p:nvPr/>
-          </p:nvCxnSpPr>
-          <p:spPr>
-            <a:xfrm>
-              <a:off x="1551284" y="3712852"/>
-              <a:ext cx="537858" cy="94181"/>
-            </a:xfrm>
-            <a:prstGeom prst="straightConnector1">
-              <a:avLst/>
-            </a:prstGeom>
-            <a:ln w="12700">
-              <a:solidFill>
-                <a:srgbClr val="00B0F0"/>
-              </a:solidFill>
-              <a:tailEnd type="triangle"/>
-            </a:ln>
-          </p:spPr>
-          <p:style>
-            <a:lnRef idx="2">
-              <a:schemeClr val="accent1"/>
-            </a:lnRef>
-            <a:fillRef idx="0">
-              <a:schemeClr val="accent1"/>
-            </a:fillRef>
-            <a:effectRef idx="1">
-              <a:schemeClr val="accent1"/>
-            </a:effectRef>
-            <a:fontRef idx="minor">
-              <a:schemeClr val="tx1"/>
-            </a:fontRef>
-          </p:style>
-        </p:cxnSp>
-        <p:cxnSp>
-          <p:nvCxnSpPr>
             <p:cNvPr id="269" name="Straight Arrow Connector 268">
               <a:extLst>
                 <a:ext uri="{FF2B5EF4-FFF2-40B4-BE49-F238E27FC236}">
@@ -7100,10 +6549,10 @@
           </p:nvGrpSpPr>
           <p:grpSpPr>
             <a:xfrm>
-              <a:off x="642939" y="847726"/>
-              <a:ext cx="3262312" cy="4074960"/>
-              <a:chOff x="830696" y="1142116"/>
-              <a:chExt cx="4908016" cy="4547456"/>
+              <a:off x="642939" y="1142707"/>
+              <a:ext cx="3262312" cy="3161873"/>
+              <a:chOff x="830696" y="1471301"/>
+              <a:chExt cx="4908016" cy="3528496"/>
             </a:xfrm>
           </p:grpSpPr>
           <p:sp>
@@ -7120,8 +6569,8 @@
             </p:nvSpPr>
             <p:spPr>
               <a:xfrm>
-                <a:off x="830696" y="1142116"/>
-                <a:ext cx="4908016" cy="4547456"/>
+                <a:off x="830696" y="1471301"/>
+                <a:ext cx="4908016" cy="3528496"/>
               </a:xfrm>
               <a:prstGeom prst="roundRect">
                 <a:avLst/>
@@ -7173,7 +6622,7 @@
             </p:nvSpPr>
             <p:spPr>
               <a:xfrm>
-                <a:off x="2911026" y="1249358"/>
+                <a:off x="3108002" y="1575134"/>
                 <a:ext cx="2630710" cy="652580"/>
               </a:xfrm>
               <a:prstGeom prst="rect">
@@ -7214,7 +6663,7 @@
           </p:nvSpPr>
           <p:spPr>
             <a:xfrm>
-              <a:off x="440015" y="3944856"/>
+              <a:off x="465390" y="3299790"/>
               <a:ext cx="1725905" cy="977830"/>
             </a:xfrm>
             <a:prstGeom prst="rect">
@@ -7303,52 +6752,6 @@
             </a:fontRef>
           </p:style>
         </p:cxnSp>
-        <p:cxnSp>
-          <p:nvCxnSpPr>
-            <p:cNvPr id="274" name="Straight Arrow Connector 273">
-              <a:extLst>
-                <a:ext uri="{FF2B5EF4-FFF2-40B4-BE49-F238E27FC236}">
-                  <a16:creationId xmlns:a16="http://schemas.microsoft.com/office/drawing/2014/main" id="{C277585C-F2F9-3521-16B8-58327980AC32}"/>
-                </a:ext>
-              </a:extLst>
-            </p:cNvPr>
-            <p:cNvCxnSpPr>
-              <a:cxnSpLocks/>
-              <a:stCxn id="287" idx="3"/>
-              <a:endCxn id="276" idx="2"/>
-            </p:cNvCxnSpPr>
-            <p:nvPr/>
-          </p:nvCxnSpPr>
-          <p:spPr>
-            <a:xfrm flipV="1">
-              <a:off x="2363970" y="2957831"/>
-              <a:ext cx="476105" cy="849202"/>
-            </a:xfrm>
-            <a:prstGeom prst="straightConnector1">
-              <a:avLst/>
-            </a:prstGeom>
-            <a:ln w="12700">
-              <a:solidFill>
-                <a:srgbClr val="00B0F0"/>
-              </a:solidFill>
-              <a:tailEnd type="triangle"/>
-            </a:ln>
-          </p:spPr>
-          <p:style>
-            <a:lnRef idx="2">
-              <a:schemeClr val="accent1"/>
-            </a:lnRef>
-            <a:fillRef idx="0">
-              <a:schemeClr val="accent1"/>
-            </a:fillRef>
-            <a:effectRef idx="1">
-              <a:schemeClr val="accent1"/>
-            </a:effectRef>
-            <a:fontRef idx="minor">
-              <a:schemeClr val="tx1"/>
-            </a:fontRef>
-          </p:style>
-        </p:cxnSp>
         <p:grpSp>
           <p:nvGrpSpPr>
             <p:cNvPr id="275" name="Group 274">
@@ -7363,10 +6766,10 @@
           </p:nvGrpSpPr>
           <p:grpSpPr>
             <a:xfrm>
-              <a:off x="2275523" y="2157057"/>
-              <a:ext cx="1739331" cy="1984519"/>
-              <a:chOff x="3778572" y="3171826"/>
-              <a:chExt cx="1707096" cy="1947741"/>
+              <a:off x="2291585" y="2157057"/>
+              <a:ext cx="1723268" cy="2011302"/>
+              <a:chOff x="3794337" y="3171826"/>
+              <a:chExt cx="1691331" cy="1974028"/>
             </a:xfrm>
           </p:grpSpPr>
           <p:sp>
@@ -7435,10 +6838,10 @@
             </p:nvGrpSpPr>
             <p:grpSpPr>
               <a:xfrm>
-                <a:off x="3778572" y="3171826"/>
-                <a:ext cx="1707096" cy="1947741"/>
-                <a:chOff x="2919193" y="3080423"/>
-                <a:chExt cx="1707096" cy="1947741"/>
+                <a:off x="3794337" y="3171826"/>
+                <a:ext cx="1691331" cy="1974028"/>
+                <a:chOff x="2934958" y="3080423"/>
+                <a:chExt cx="1691331" cy="1974028"/>
               </a:xfrm>
             </p:grpSpPr>
             <p:grpSp>
@@ -7578,8 +6981,8 @@
               </p:nvSpPr>
               <p:spPr>
                 <a:xfrm>
-                  <a:off x="2919193" y="3940702"/>
-                  <a:ext cx="1693919" cy="1087462"/>
+                  <a:off x="2943820" y="3966989"/>
+                  <a:ext cx="1669293" cy="1087462"/>
                 </a:xfrm>
                 <a:prstGeom prst="rect">
                   <a:avLst/>
